--- a/projects/templates/template_pitch_deck/output/pptx/template_template_pitch_short.pptx
+++ b/projects/templates/template_pitch_deck/output/pptx/template_template_pitch_short.pptx
@@ -4714,7 +4714,7 @@
               </a:defRPr>
             </a:pPr>
             <a:r>
-              <a:t>•  One of 20 public exemplar templates in the same monorepo, each independently tested and coverage-gated.</a:t>
+              <a:t>•  One of 19 public exemplar templates in the same monorepo, each independently tested and coverage-gated.</a:t>
             </a:r>
           </a:p>
         </p:txBody>
@@ -5810,7 +5810,7 @@
               </a:defRPr>
             </a:pPr>
             <a:r>
-              <a:t>•  The pattern generalizes across the whole projects/templates/ folder — all 20 exemplars, not just one cherry-picked example — follow the identical thin-orchestrator, two-layer architecture.</a:t>
+              <a:t>•  The pattern generalizes across the whole projects/templates/ folder — all 19 exemplars, not just one cherry-picked example — follow the identical thin-orchestrator, two-layer architecture.</a:t>
             </a:r>
           </a:p>
         </p:txBody>

--- a/projects/templates/template_pitch_deck/output/pptx/template_template_pitch_short.pptx
+++ b/projects/templates/template_pitch_deck/output/pptx/template_template_pitch_short.pptx
@@ -4031,7 +4031,7 @@
         <p:spPr>
           <a:xfrm>
             <a:off x="502920" y="1097280"/>
-            <a:ext cx="8138160" cy="3771900"/>
+            <a:ext cx="8138160" cy="2560320"/>
           </a:xfrm>
           <a:prstGeom prst="rect">
             <a:avLst/>
@@ -4452,7 +4452,7 @@
         <p:spPr>
           <a:xfrm>
             <a:off x="502920" y="1097280"/>
-            <a:ext cx="8138160" cy="3771900"/>
+            <a:ext cx="8138160" cy="2112264"/>
           </a:xfrm>
           <a:prstGeom prst="rect">
             <a:avLst/>
@@ -4660,7 +4660,7 @@
         <p:spPr>
           <a:xfrm>
             <a:off x="502920" y="1097280"/>
-            <a:ext cx="8138160" cy="3771900"/>
+            <a:ext cx="8138160" cy="2112264"/>
           </a:xfrm>
           <a:prstGeom prst="rect">
             <a:avLst/>
@@ -4714,7 +4714,7 @@
               </a:defRPr>
             </a:pPr>
             <a:r>
-              <a:t>•  One of 23 public exemplar templates in the same monorepo, each independently tested and coverage-gated.</a:t>
+              <a:t>•  One of 24 public exemplar templates in the same monorepo, each independently tested and coverage-gated.</a:t>
             </a:r>
           </a:p>
         </p:txBody>
@@ -4902,7 +4902,7 @@
         <p:spPr>
           <a:xfrm>
             <a:off x="502920" y="1097280"/>
-            <a:ext cx="8138160" cy="3771900"/>
+            <a:ext cx="8138160" cy="1856232"/>
           </a:xfrm>
           <a:prstGeom prst="rect">
             <a:avLst/>
@@ -5308,7 +5308,7 @@
                   <a:srgbClr val="B3131A"/>
                 </a:solidFill>
               </a:rPr>
-              <a:t>130 tests</a:t>
+              <a:t>147 tests</a:t>
             </a:r>
           </a:p>
         </p:txBody>
@@ -5341,7 +5341,7 @@
                   <a:srgbClr val="0A0A0A"/>
                 </a:solidFill>
               </a:rPr>
-              <a:t>99.37% coverage on template_template's own source — the same gate every exemplar in the repo must pass.</a:t>
+              <a:t>97.66% coverage on template_template's own source — the same gate every exemplar in the repo must pass.</a:t>
             </a:r>
           </a:p>
         </p:txBody>
@@ -5529,7 +5529,7 @@
         <p:spPr>
           <a:xfrm>
             <a:off x="502920" y="1097280"/>
-            <a:ext cx="8138160" cy="3771900"/>
+            <a:ext cx="8138160" cy="1600200"/>
           </a:xfrm>
           <a:prstGeom prst="rect">
             <a:avLst/>
@@ -5756,7 +5756,7 @@
         <p:spPr>
           <a:xfrm>
             <a:off x="502920" y="1097280"/>
-            <a:ext cx="8138160" cy="3771900"/>
+            <a:ext cx="8138160" cy="2368296"/>
           </a:xfrm>
           <a:prstGeom prst="rect">
             <a:avLst/>
@@ -5810,7 +5810,7 @@
               </a:defRPr>
             </a:pPr>
             <a:r>
-              <a:t>•  The pattern generalizes across the whole projects/templates/ folder — all 23 exemplars, not just one cherry-picked example — follow the identical thin-orchestrator, two-layer architecture.</a:t>
+              <a:t>•  The pattern generalizes across the whole projects/templates/ folder — all 24 exemplars, not just one cherry-picked example — follow the identical thin-orchestrator, two-layer architecture.</a:t>
             </a:r>
           </a:p>
         </p:txBody>
@@ -5998,7 +5998,7 @@
         <p:spPr>
           <a:xfrm>
             <a:off x="502920" y="1097280"/>
-            <a:ext cx="8138160" cy="3771900"/>
+            <a:ext cx="8138160" cy="2112264"/>
           </a:xfrm>
           <a:prstGeom prst="rect">
             <a:avLst/>

--- a/projects/templates/template_pitch_deck/output/pptx/template_template_pitch_short.pptx
+++ b/projects/templates/template_pitch_deck/output/pptx/template_template_pitch_short.pptx
@@ -4007,7 +4007,9 @@
           </a:fontRef>
         </p:style>
         <p:txBody>
-          <a:bodyPr rtlCol="0" anchor="ctr" lIns="502920"/>
+          <a:bodyPr rtlCol="0" anchor="ctr" wrap="none" lIns="502920" rIns="502920">
+            <a:noAutofit/>
+          </a:bodyPr>
           <a:lstStyle/>
           <a:p>
             <a:pPr algn="ctr"/>
@@ -4016,6 +4018,7 @@
                 <a:solidFill>
                   <a:srgbClr val="FFFFFF"/>
                 </a:solidFill>
+                <a:latin typeface="Helvetica"/>
               </a:rPr>
               <a:t>The ask</a:t>
             </a:r>
@@ -4030,8 +4033,8 @@
         </p:nvSpPr>
         <p:spPr>
           <a:xfrm>
-            <a:off x="502920" y="1097280"/>
-            <a:ext cx="8138160" cy="2560320"/>
+            <a:off x="502920" y="1070305"/>
+            <a:ext cx="8138160" cy="2660523"/>
           </a:xfrm>
           <a:prstGeom prst="rect">
             <a:avLst/>
@@ -4039,68 +4042,104 @@
           <a:noFill/>
         </p:spPr>
         <p:txBody>
-          <a:bodyPr wrap="square">
-            <a:spAutoFit/>
+          <a:bodyPr wrap="none" anchor="t" lIns="0" rIns="0" tIns="0" bIns="0">
+            <a:noAutofit/>
           </a:bodyPr>
           <a:lstStyle/>
           <a:p>
             <a:pPr>
+              <a:lnSpc>
+                <a:spcPts val="2100"/>
+              </a:lnSpc>
               <a:spcAft>
-                <a:spcPts val="1000"/>
+                <a:spcPts val="828"/>
               </a:spcAft>
               <a:defRPr sz="1800">
                 <a:solidFill>
                   <a:srgbClr val="0A0A0A"/>
                 </a:solidFill>
+                <a:latin typeface="Helvetica"/>
               </a:defRPr>
             </a:pPr>
             <a:r>
-              <a:t>•  Adopt this pattern for your own methods papers: bind every reported number to the code that produced it, not to a hand-typed table.</a:t>
+              <a:t>• Adopt this pattern for your own methods papers: bind every reported number</a:t>
+            </a:r>
+            <a:br/>
+            <a:r>
+              <a:t>to the code that produced it, not to a hand-typed table.</a:t>
             </a:r>
           </a:p>
           <a:p>
             <a:pPr>
+              <a:lnSpc>
+                <a:spcPts val="2100"/>
+              </a:lnSpc>
               <a:spcAft>
-                <a:spcPts val="1000"/>
+                <a:spcPts val="828"/>
               </a:spcAft>
               <a:defRPr sz="1800">
                 <a:solidFill>
                   <a:srgbClr val="0A0A0A"/>
                 </a:solidFill>
+                <a:latin typeface="Helvetica"/>
               </a:defRPr>
             </a:pPr>
             <a:r>
-              <a:t>•  Pilot it on one existing manuscript in your group before committing to a full rewrite.</a:t>
+              <a:t>• Pilot it on one existing manuscript in your group before committing to a full</a:t>
+            </a:r>
+            <a:br/>
+            <a:r>
+              <a:t>rewrite.</a:t>
             </a:r>
           </a:p>
           <a:p>
             <a:pPr>
+              <a:lnSpc>
+                <a:spcPts val="2100"/>
+              </a:lnSpc>
               <a:spcAft>
-                <a:spcPts val="1000"/>
+                <a:spcPts val="828"/>
               </a:spcAft>
               <a:defRPr sz="1800">
                 <a:solidFill>
                   <a:srgbClr val="0A0A0A"/>
                 </a:solidFill>
+                <a:latin typeface="Helvetica"/>
               </a:defRPr>
             </a:pPr>
             <a:r>
-              <a:t>•  Happy to pair with your team through a first regeneration cycle, if useful — no prior engagements to point to yet, this pattern is newly forkable.</a:t>
+              <a:t>• Happy to pair with your team through a first regeneration cycle, if useful — no</a:t>
+            </a:r>
+            <a:br/>
+            <a:r>
+              <a:t>prior engagements to point to yet, this pattern is newly forkable.</a:t>
             </a:r>
           </a:p>
           <a:p>
             <a:pPr>
+              <a:lnSpc>
+                <a:spcPts val="2100"/>
+              </a:lnSpc>
               <a:spcAft>
-                <a:spcPts val="1000"/>
+                <a:spcPts val="0"/>
               </a:spcAft>
               <a:defRPr sz="1800">
                 <a:solidFill>
                   <a:srgbClr val="0A0A0A"/>
                 </a:solidFill>
+                <a:latin typeface="Helvetica"/>
               </a:defRPr>
             </a:pPr>
             <a:r>
-              <a:t>•  Open to funding conversations and scoping a consulting engagement for a deeper or custom integration — no prior engagements exist yet; this is an invitation to talk, not an established offering.</a:t>
+              <a:t>• Open to funding conversations and scoping a consulting engagement for a</a:t>
+            </a:r>
+            <a:br/>
+            <a:r>
+              <a:t>deeper or custom integration — no prior engagements exist yet; this is an</a:t>
+            </a:r>
+            <a:br/>
+            <a:r>
+              <a:t>invitation to talk, not an established offering.</a:t>
             </a:r>
           </a:p>
         </p:txBody>
@@ -4428,7 +4467,9 @@
           </a:fontRef>
         </p:style>
         <p:txBody>
-          <a:bodyPr rtlCol="0" anchor="ctr" lIns="502920"/>
+          <a:bodyPr rtlCol="0" anchor="ctr" wrap="none" lIns="502920" rIns="502920">
+            <a:noAutofit/>
+          </a:bodyPr>
           <a:lstStyle/>
           <a:p>
             <a:pPr algn="ctr"/>
@@ -4437,6 +4478,7 @@
                 <a:solidFill>
                   <a:srgbClr val="FFFFFF"/>
                 </a:solidFill>
+                <a:latin typeface="Helvetica"/>
               </a:rPr>
               <a:t>The problem</a:t>
             </a:r>
@@ -4451,8 +4493,8 @@
         </p:nvSpPr>
         <p:spPr>
           <a:xfrm>
-            <a:off x="502920" y="1097280"/>
-            <a:ext cx="8138160" cy="2112264"/>
+            <a:off x="502920" y="1070305"/>
+            <a:ext cx="8138160" cy="1755267"/>
           </a:xfrm>
           <a:prstGeom prst="rect">
             <a:avLst/>
@@ -4460,53 +4502,77 @@
           <a:noFill/>
         </p:spPr>
         <p:txBody>
-          <a:bodyPr wrap="square">
-            <a:spAutoFit/>
+          <a:bodyPr wrap="none" anchor="t" lIns="0" rIns="0" tIns="0" bIns="0">
+            <a:noAutofit/>
           </a:bodyPr>
           <a:lstStyle/>
           <a:p>
             <a:pPr>
+              <a:lnSpc>
+                <a:spcPts val="2100"/>
+              </a:lnSpc>
               <a:spcAft>
-                <a:spcPts val="1000"/>
+                <a:spcPts val="828"/>
               </a:spcAft>
               <a:defRPr sz="1800">
                 <a:solidFill>
                   <a:srgbClr val="0A0A0A"/>
                 </a:solidFill>
+                <a:latin typeface="Helvetica"/>
               </a:defRPr>
             </a:pPr>
             <a:r>
-              <a:t>•  Research groups publish claims about their own tools and pipelines that no one outside the team can re-check.</a:t>
+              <a:t>• Research groups publish claims about their own tools and pipelines that no</a:t>
+            </a:r>
+            <a:br/>
+            <a:r>
+              <a:t>one outside the team can re-check.</a:t>
             </a:r>
           </a:p>
           <a:p>
             <a:pPr>
+              <a:lnSpc>
+                <a:spcPts val="2100"/>
+              </a:lnSpc>
               <a:spcAft>
-                <a:spcPts val="1000"/>
+                <a:spcPts val="828"/>
               </a:spcAft>
               <a:defRPr sz="1800">
                 <a:solidFill>
                   <a:srgbClr val="0A0A0A"/>
                 </a:solidFill>
+                <a:latin typeface="Helvetica"/>
               </a:defRPr>
             </a:pPr>
             <a:r>
-              <a:t>•  Manuscripts describing infrastructure go stale the moment the infrastructure changes underneath them.</a:t>
+              <a:t>• Manuscripts describing infrastructure go stale the moment the infrastructure</a:t>
+            </a:r>
+            <a:br/>
+            <a:r>
+              <a:t>changes underneath them.</a:t>
             </a:r>
           </a:p>
           <a:p>
             <a:pPr>
+              <a:lnSpc>
+                <a:spcPts val="2100"/>
+              </a:lnSpc>
               <a:spcAft>
-                <a:spcPts val="1000"/>
+                <a:spcPts val="0"/>
               </a:spcAft>
               <a:defRPr sz="1800">
                 <a:solidFill>
                   <a:srgbClr val="0A0A0A"/>
                 </a:solidFill>
+                <a:latin typeface="Helvetica"/>
               </a:defRPr>
             </a:pPr>
             <a:r>
-              <a:t>•  Reproducibility efforts usually stop at the data and code layer — the documentation layer is still hand-maintained and drifts silently.</a:t>
+              <a:t>• Reproducibility efforts usually stop at the data and code layer — the</a:t>
+            </a:r>
+            <a:br/>
+            <a:r>
+              <a:t>documentation layer is still hand-maintained and drifts silently.</a:t>
             </a:r>
           </a:p>
         </p:txBody>
@@ -4636,7 +4702,9 @@
           </a:fontRef>
         </p:style>
         <p:txBody>
-          <a:bodyPr rtlCol="0" anchor="ctr" lIns="502920"/>
+          <a:bodyPr rtlCol="0" anchor="ctr" wrap="none" lIns="502920" rIns="502920">
+            <a:noAutofit/>
+          </a:bodyPr>
           <a:lstStyle/>
           <a:p>
             <a:pPr algn="ctr"/>
@@ -4645,6 +4713,7 @@
                 <a:solidFill>
                   <a:srgbClr val="FFFFFF"/>
                 </a:solidFill>
+                <a:latin typeface="Helvetica"/>
               </a:rPr>
               <a:t>What template_template is</a:t>
             </a:r>
@@ -4659,8 +4728,8 @@
         </p:nvSpPr>
         <p:spPr>
           <a:xfrm>
-            <a:off x="502920" y="1097280"/>
-            <a:ext cx="8138160" cy="2112264"/>
+            <a:off x="502920" y="1070305"/>
+            <a:ext cx="8138160" cy="1755267"/>
           </a:xfrm>
           <a:prstGeom prst="rect">
             <a:avLst/>
@@ -4668,53 +4737,77 @@
           <a:noFill/>
         </p:spPr>
         <p:txBody>
-          <a:bodyPr wrap="square">
-            <a:spAutoFit/>
+          <a:bodyPr wrap="none" anchor="t" lIns="0" rIns="0" tIns="0" bIns="0">
+            <a:noAutofit/>
           </a:bodyPr>
           <a:lstStyle/>
           <a:p>
             <a:pPr>
+              <a:lnSpc>
+                <a:spcPts val="2100"/>
+              </a:lnSpc>
               <a:spcAft>
-                <a:spcPts val="1000"/>
+                <a:spcPts val="828"/>
               </a:spcAft>
               <a:defRPr sz="1800">
                 <a:solidFill>
                   <a:srgbClr val="0A0A0A"/>
                 </a:solidFill>
+                <a:latin typeface="Helvetica"/>
               </a:defRPr>
             </a:pPr>
             <a:r>
-              <a:t>•  A manuscript that is generated FROM the repository it describes, not written ABOUT it from memory.</a:t>
+              <a:t>• A manuscript that is generated FROM the repository it describes, not written</a:t>
+            </a:r>
+            <a:br/>
+            <a:r>
+              <a:t>ABOUT it from memory.</a:t>
             </a:r>
           </a:p>
           <a:p>
             <a:pPr>
+              <a:lnSpc>
+                <a:spcPts val="2100"/>
+              </a:lnSpc>
               <a:spcAft>
-                <a:spcPts val="1000"/>
+                <a:spcPts val="828"/>
               </a:spcAft>
               <a:defRPr sz="1800">
                 <a:solidFill>
                   <a:srgbClr val="0A0A0A"/>
                 </a:solidFill>
+                <a:latin typeface="Helvetica"/>
               </a:defRPr>
             </a:pPr>
             <a:r>
-              <a:t>•  Every metric in the paper — module counts, test counts, pipeline stages — is computed live by template_template's own introspection code.</a:t>
+              <a:t>• Every metric in the paper — module counts, test counts, pipeline stages — is</a:t>
+            </a:r>
+            <a:br/>
+            <a:r>
+              <a:t>computed live by template_template's own introspection code.</a:t>
             </a:r>
           </a:p>
           <a:p>
             <a:pPr>
+              <a:lnSpc>
+                <a:spcPts val="2100"/>
+              </a:lnSpc>
               <a:spcAft>
-                <a:spcPts val="1000"/>
+                <a:spcPts val="0"/>
               </a:spcAft>
               <a:defRPr sz="1800">
                 <a:solidFill>
                   <a:srgbClr val="0A0A0A"/>
                 </a:solidFill>
+                <a:latin typeface="Helvetica"/>
               </a:defRPr>
             </a:pPr>
             <a:r>
-              <a:t>•  One of 24 public exemplar templates in the same monorepo, each independently tested and coverage-gated.</a:t>
+              <a:t>• One of 24 public exemplar templates in the same monorepo, each</a:t>
+            </a:r>
+            <a:br/>
+            <a:r>
+              <a:t>independently tested and coverage-gated.</a:t>
             </a:r>
           </a:p>
         </p:txBody>
@@ -4878,7 +4971,9 @@
           </a:fontRef>
         </p:style>
         <p:txBody>
-          <a:bodyPr rtlCol="0" anchor="ctr" lIns="502920"/>
+          <a:bodyPr rtlCol="0" anchor="ctr" wrap="none" lIns="502920" rIns="502920">
+            <a:noAutofit/>
+          </a:bodyPr>
           <a:lstStyle/>
           <a:p>
             <a:pPr algn="ctr"/>
@@ -4887,6 +4982,7 @@
                 <a:solidFill>
                   <a:srgbClr val="FFFFFF"/>
                 </a:solidFill>
+                <a:latin typeface="Helvetica"/>
               </a:rPr>
               <a:t>How it works</a:t>
             </a:r>
@@ -4901,8 +4997,8 @@
         </p:nvSpPr>
         <p:spPr>
           <a:xfrm>
-            <a:off x="502920" y="1097280"/>
-            <a:ext cx="8138160" cy="1856232"/>
+            <a:off x="502920" y="1070305"/>
+            <a:ext cx="8138160" cy="1755267"/>
           </a:xfrm>
           <a:prstGeom prst="rect">
             <a:avLst/>
@@ -4910,53 +5006,77 @@
           <a:noFill/>
         </p:spPr>
         <p:txBody>
-          <a:bodyPr wrap="square">
-            <a:spAutoFit/>
+          <a:bodyPr wrap="none" anchor="t" lIns="0" rIns="0" tIns="0" bIns="0">
+            <a:noAutofit/>
           </a:bodyPr>
           <a:lstStyle/>
           <a:p>
             <a:pPr>
+              <a:lnSpc>
+                <a:spcPts val="2100"/>
+              </a:lnSpc>
               <a:spcAft>
-                <a:spcPts val="1000"/>
+                <a:spcPts val="828"/>
               </a:spcAft>
               <a:defRPr sz="1800">
                 <a:solidFill>
                   <a:srgbClr val="0A0A0A"/>
                 </a:solidFill>
+                <a:latin typeface="Helvetica"/>
               </a:defRPr>
             </a:pPr>
             <a:r>
-              <a:t>•  src/template_template/introspection.py scans infrastructure/ modules, the pipeline DAG, and the public project roster.</a:t>
+              <a:t>• src/template_template/introspection.py scans infrastructure/ modules, the</a:t>
+            </a:r>
+            <a:br/>
+            <a:r>
+              <a:t>pipeline DAG, and the public project roster.</a:t>
             </a:r>
           </a:p>
           <a:p>
             <a:pPr>
+              <a:lnSpc>
+                <a:spcPts val="2100"/>
+              </a:lnSpc>
               <a:spcAft>
-                <a:spcPts val="1000"/>
+                <a:spcPts val="828"/>
               </a:spcAft>
               <a:defRPr sz="1800">
                 <a:solidFill>
                   <a:srgbClr val="0A0A0A"/>
                 </a:solidFill>
+                <a:latin typeface="Helvetica"/>
               </a:defRPr>
             </a:pPr>
             <a:r>
-              <a:t>•  metrics.py turns that scan into a dictionary of ${variable} values; inject_metrics.py substitutes them into the manuscript text.</a:t>
+              <a:t>• metrics.py turns that scan into a dictionary of ${variable} values;</a:t>
+            </a:r>
+            <a:br/>
+            <a:r>
+              <a:t>inject_metrics.py substitutes them into the manuscript text.</a:t>
             </a:r>
           </a:p>
           <a:p>
             <a:pPr>
+              <a:lnSpc>
+                <a:spcPts val="2100"/>
+              </a:lnSpc>
               <a:spcAft>
-                <a:spcPts val="1000"/>
+                <a:spcPts val="0"/>
               </a:spcAft>
               <a:defRPr sz="1800">
                 <a:solidFill>
                   <a:srgbClr val="0A0A0A"/>
                 </a:solidFill>
+                <a:latin typeface="Helvetica"/>
               </a:defRPr>
             </a:pPr>
             <a:r>
-              <a:t>•  Re-running the pipeline regenerates the paper from current repository state — the citation and the artifact cannot drift apart.</a:t>
+              <a:t>• Re-running the pipeline regenerates the paper from current repository state —</a:t>
+            </a:r>
+            <a:br/>
+            <a:r>
+              <a:t>the citation and the artifact cannot drift apart.</a:t>
             </a:r>
           </a:p>
         </p:txBody>
@@ -5086,7 +5206,9 @@
           </a:fontRef>
         </p:style>
         <p:txBody>
-          <a:bodyPr rtlCol="0" anchor="ctr" lIns="502920"/>
+          <a:bodyPr rtlCol="0" anchor="ctr" wrap="none" lIns="502920" rIns="502920">
+            <a:noAutofit/>
+          </a:bodyPr>
           <a:lstStyle/>
           <a:p>
             <a:pPr algn="ctr"/>
@@ -5095,6 +5217,7 @@
                 <a:solidFill>
                   <a:srgbClr val="FFFFFF"/>
                 </a:solidFill>
+                <a:latin typeface="Helvetica"/>
               </a:rPr>
               <a:t>Two-layer architecture, at a glance</a:t>
             </a:r>
@@ -5117,8 +5240,8 @@
         </p:blipFill>
         <p:spPr>
           <a:xfrm>
-            <a:off x="914400" y="914400"/>
-            <a:ext cx="7315200" cy="8366175"/>
+            <a:off x="3078875" y="914400"/>
+            <a:ext cx="2986249" cy="3415284"/>
           </a:xfrm>
           <a:prstGeom prst="rect">
             <a:avLst/>
@@ -5505,7 +5628,9 @@
           </a:fontRef>
         </p:style>
         <p:txBody>
-          <a:bodyPr rtlCol="0" anchor="ctr" lIns="502920"/>
+          <a:bodyPr rtlCol="0" anchor="ctr" wrap="none" lIns="502920" rIns="502920">
+            <a:noAutofit/>
+          </a:bodyPr>
           <a:lstStyle/>
           <a:p>
             <a:pPr algn="ctr"/>
@@ -5514,6 +5639,7 @@
                 <a:solidFill>
                   <a:srgbClr val="FFFFFF"/>
                 </a:solidFill>
+                <a:latin typeface="Helvetica"/>
               </a:rPr>
               <a:t>Already public</a:t>
             </a:r>
@@ -5528,8 +5654,8 @@
         </p:nvSpPr>
         <p:spPr>
           <a:xfrm>
-            <a:off x="502920" y="1097280"/>
-            <a:ext cx="8138160" cy="1600200"/>
+            <a:off x="502920" y="1070305"/>
+            <a:ext cx="8138160" cy="1383410"/>
           </a:xfrm>
           <a:prstGeom prst="rect">
             <a:avLst/>
@@ -5537,38 +5663,58 @@
           <a:noFill/>
         </p:spPr>
         <p:txBody>
-          <a:bodyPr wrap="square">
-            <a:spAutoFit/>
+          <a:bodyPr wrap="none" anchor="t" lIns="0" rIns="0" tIns="0" bIns="0">
+            <a:noAutofit/>
           </a:bodyPr>
           <a:lstStyle/>
           <a:p>
             <a:pPr>
+              <a:lnSpc>
+                <a:spcPts val="2100"/>
+              </a:lnSpc>
               <a:spcAft>
-                <a:spcPts val="1000"/>
+                <a:spcPts val="828"/>
               </a:spcAft>
               <a:defRPr sz="1800">
                 <a:solidFill>
                   <a:srgbClr val="0A0A0A"/>
                 </a:solidFill>
+                <a:latin typeface="Helvetica"/>
               </a:defRPr>
             </a:pPr>
             <a:r>
-              <a:t>•  Concept DOI 10.5281/zenodo.20419007, 9 durable publication records already on file: Zenodo, GitHub, PyPI (sandbox), IPFS, Software Heritage, GitHub Pages, Netlify, Hugging Face, OSF.</a:t>
+              <a:t>• Concept DOI 10.5281/zenodo.20419007, 9 durable publication records already</a:t>
+            </a:r>
+            <a:br/>
+            <a:r>
+              <a:t>on file: Zenodo, GitHub, PyPI (sandbox), IPFS, Software Heritage, GitHub</a:t>
+            </a:r>
+            <a:br/>
+            <a:r>
+              <a:t>Pages, Netlify, Hugging Face, OSF.</a:t>
             </a:r>
           </a:p>
           <a:p>
             <a:pPr>
+              <a:lnSpc>
+                <a:spcPts val="2100"/>
+              </a:lnSpc>
               <a:spcAft>
-                <a:spcPts val="1000"/>
+                <a:spcPts val="0"/>
               </a:spcAft>
               <a:defRPr sz="1800">
                 <a:solidFill>
                   <a:srgbClr val="0A0A0A"/>
                 </a:solidFill>
+                <a:latin typeface="Helvetica"/>
               </a:defRPr>
             </a:pPr>
             <a:r>
-              <a:t>•  Licensed Apache-2.0 — the introspection code, not only the prose, is available for a science-integrity team to audit directly.</a:t>
+              <a:t>• Licensed Apache-2.0 — the introspection code, not only the prose, is available</a:t>
+            </a:r>
+            <a:br/>
+            <a:r>
+              <a:t>for a science-integrity team to audit directly.</a:t>
             </a:r>
           </a:p>
         </p:txBody>
@@ -5732,7 +5878,9 @@
           </a:fontRef>
         </p:style>
         <p:txBody>
-          <a:bodyPr rtlCol="0" anchor="ctr" lIns="502920"/>
+          <a:bodyPr rtlCol="0" anchor="ctr" wrap="none" lIns="502920" rIns="502920">
+            <a:noAutofit/>
+          </a:bodyPr>
           <a:lstStyle/>
           <a:p>
             <a:pPr algn="ctr"/>
@@ -5741,6 +5889,7 @@
                 <a:solidFill>
                   <a:srgbClr val="FFFFFF"/>
                 </a:solidFill>
+                <a:latin typeface="Helvetica"/>
               </a:rPr>
               <a:t>Why this matters for science integrity</a:t>
             </a:r>
@@ -5755,8 +5904,8 @@
         </p:nvSpPr>
         <p:spPr>
           <a:xfrm>
-            <a:off x="502920" y="1097280"/>
-            <a:ext cx="8138160" cy="2368296"/>
+            <a:off x="502920" y="1070305"/>
+            <a:ext cx="8138160" cy="2021967"/>
           </a:xfrm>
           <a:prstGeom prst="rect">
             <a:avLst/>
@@ -5764,53 +5913,81 @@
           <a:noFill/>
         </p:spPr>
         <p:txBody>
-          <a:bodyPr wrap="square">
-            <a:spAutoFit/>
+          <a:bodyPr wrap="none" anchor="t" lIns="0" rIns="0" tIns="0" bIns="0">
+            <a:noAutofit/>
           </a:bodyPr>
           <a:lstStyle/>
           <a:p>
             <a:pPr>
+              <a:lnSpc>
+                <a:spcPts val="2100"/>
+              </a:lnSpc>
               <a:spcAft>
-                <a:spcPts val="1000"/>
+                <a:spcPts val="828"/>
               </a:spcAft>
               <a:defRPr sz="1800">
                 <a:solidFill>
                   <a:srgbClr val="0A0A0A"/>
                 </a:solidFill>
+                <a:latin typeface="Helvetica"/>
               </a:defRPr>
             </a:pPr>
             <a:r>
-              <a:t>•  A funder or reviewer can clone the repository and regenerate the exact figures and counts cited in the manuscript, on their own machine.</a:t>
+              <a:t>• A funder or reviewer can clone the repository and regenerate the exact figures</a:t>
+            </a:r>
+            <a:br/>
+            <a:r>
+              <a:t>and counts cited in the manuscript, on their own machine.</a:t>
             </a:r>
           </a:p>
           <a:p>
             <a:pPr>
+              <a:lnSpc>
+                <a:spcPts val="2100"/>
+              </a:lnSpc>
               <a:spcAft>
-                <a:spcPts val="1000"/>
+                <a:spcPts val="828"/>
               </a:spcAft>
               <a:defRPr sz="1800">
                 <a:solidFill>
                   <a:srgbClr val="0A0A0A"/>
                 </a:solidFill>
+                <a:latin typeface="Helvetica"/>
               </a:defRPr>
             </a:pPr>
             <a:r>
-              <a:t>•  The same no-mocks, coverage-gated testing discipline that verifies the code also verifies the claims made about the code.</a:t>
+              <a:t>• The same no-mocks, coverage-gated testing discipline that verifies the code</a:t>
+            </a:r>
+            <a:br/>
+            <a:r>
+              <a:t>also verifies the claims made about the code.</a:t>
             </a:r>
           </a:p>
           <a:p>
             <a:pPr>
+              <a:lnSpc>
+                <a:spcPts val="2100"/>
+              </a:lnSpc>
               <a:spcAft>
-                <a:spcPts val="1000"/>
+                <a:spcPts val="0"/>
               </a:spcAft>
               <a:defRPr sz="1800">
                 <a:solidFill>
                   <a:srgbClr val="0A0A0A"/>
                 </a:solidFill>
+                <a:latin typeface="Helvetica"/>
               </a:defRPr>
             </a:pPr>
             <a:r>
-              <a:t>•  The pattern generalizes across the whole projects/templates/ folder — all 24 exemplars, not just one cherry-picked example — follow the identical thin-orchestrator, two-layer architecture.</a:t>
+              <a:t>• The pattern generalizes across the whole projects/templates/ folder — all 24</a:t>
+            </a:r>
+            <a:br/>
+            <a:r>
+              <a:t>exemplars, not just one cherry-picked example — follow the identical</a:t>
+            </a:r>
+            <a:br/>
+            <a:r>
+              <a:t>thin-orchestrator, two-layer architecture.</a:t>
             </a:r>
           </a:p>
         </p:txBody>
@@ -5974,7 +6151,9 @@
           </a:fontRef>
         </p:style>
         <p:txBody>
-          <a:bodyPr rtlCol="0" anchor="ctr" lIns="502920"/>
+          <a:bodyPr rtlCol="0" anchor="ctr" wrap="none" lIns="502920" rIns="502920">
+            <a:noAutofit/>
+          </a:bodyPr>
           <a:lstStyle/>
           <a:p>
             <a:pPr algn="ctr"/>
@@ -5983,6 +6162,7 @@
                 <a:solidFill>
                   <a:srgbClr val="FFFFFF"/>
                 </a:solidFill>
+                <a:latin typeface="Helvetica"/>
               </a:rPr>
               <a:t>Cite this deck</a:t>
             </a:r>
@@ -5997,8 +6177,8 @@
         </p:nvSpPr>
         <p:spPr>
           <a:xfrm>
-            <a:off x="502920" y="1097280"/>
-            <a:ext cx="8138160" cy="2112264"/>
+            <a:off x="502920" y="1070305"/>
+            <a:ext cx="8138160" cy="2021966"/>
           </a:xfrm>
           <a:prstGeom prst="rect">
             <a:avLst/>
@@ -6006,53 +6186,81 @@
           <a:noFill/>
         </p:spPr>
         <p:txBody>
-          <a:bodyPr wrap="square">
-            <a:spAutoFit/>
+          <a:bodyPr wrap="none" anchor="t" lIns="0" rIns="0" tIns="0" bIns="0">
+            <a:noAutofit/>
           </a:bodyPr>
           <a:lstStyle/>
           <a:p>
             <a:pPr>
+              <a:lnSpc>
+                <a:spcPts val="2100"/>
+              </a:lnSpc>
               <a:spcAft>
-                <a:spcPts val="1000"/>
+                <a:spcPts val="828"/>
               </a:spcAft>
               <a:defRPr sz="1800">
                 <a:solidFill>
                   <a:srgbClr val="0A0A0A"/>
                 </a:solidFill>
+                <a:latin typeface="Helvetica"/>
               </a:defRPr>
             </a:pPr>
             <a:r>
-              <a:t>•  This pitch deck (template_template_pitch_short.pdf) is its own exemplar in the same monorepo — it has its own source, tests, and citable identity, separate from the DOI of the project it pitches.</a:t>
+              <a:t>• This pitch deck (template_template_pitch_short.pdf) is its own exemplar in the</a:t>
+            </a:r>
+            <a:br/>
+            <a:r>
+              <a:t>same monorepo — it has its own source, tests, and citable identity, separate</a:t>
+            </a:r>
+            <a:br/>
+            <a:r>
+              <a:t>from the DOI of the project it pitches.</a:t>
             </a:r>
           </a:p>
           <a:p>
             <a:pPr>
+              <a:lnSpc>
+                <a:spcPts val="2100"/>
+              </a:lnSpc>
               <a:spcAft>
-                <a:spcPts val="1000"/>
+                <a:spcPts val="828"/>
               </a:spcAft>
               <a:defRPr sz="1800">
                 <a:solidFill>
                   <a:srgbClr val="0A0A0A"/>
                 </a:solidFill>
+                <a:latin typeface="Helvetica"/>
               </a:defRPr>
             </a:pPr>
             <a:r>
-              <a:t>•  This deck's own DOI: 10.5281/zenodo.21281509.</a:t>
+              <a:t>• This deck's own DOI: 10.5281/zenodo.21281509.</a:t>
             </a:r>
           </a:p>
           <a:p>
             <a:pPr>
+              <a:lnSpc>
+                <a:spcPts val="2100"/>
+              </a:lnSpc>
               <a:spcAft>
-                <a:spcPts val="1000"/>
+                <a:spcPts val="0"/>
               </a:spcAft>
               <a:defRPr sz="1800">
                 <a:solidFill>
                   <a:srgbClr val="0A0A0A"/>
                 </a:solidFill>
+                <a:latin typeface="Helvetica"/>
               </a:defRPr>
             </a:pPr>
             <a:r>
-              <a:t>•  Every slide also carries a QR code to its own standalone, citable page — see the deep-linking mechanism described later in the medium and long versions of this deck.</a:t>
+              <a:t>• Every slide also carries a QR code to its own standalone, citable page — see</a:t>
+            </a:r>
+            <a:br/>
+            <a:r>
+              <a:t>the deep-linking mechanism described later in the medium and long versions of</a:t>
+            </a:r>
+            <a:br/>
+            <a:r>
+              <a:t>this deck.</a:t>
             </a:r>
           </a:p>
         </p:txBody>
